--- a/pptx/Fig3.pptx
+++ b/pptx/Fig3.pptx
@@ -243,7 +243,7 @@
           <a:p>
             <a:fld id="{58B75DFA-885B-4A38-BC74-AE162579FFAE}" type="datetimeFigureOut">
               <a:rPr lang="en-US" smtClean="0"/>
-              <a:t>10/19/2026</a:t>
+              <a:t>10/23/2026</a:t>
             </a:fld>
             <a:endParaRPr lang="en-US"/>
           </a:p>
@@ -413,7 +413,7 @@
           <a:p>
             <a:fld id="{58B75DFA-885B-4A38-BC74-AE162579FFAE}" type="datetimeFigureOut">
               <a:rPr lang="en-US" smtClean="0"/>
-              <a:t>10/19/2026</a:t>
+              <a:t>10/23/2026</a:t>
             </a:fld>
             <a:endParaRPr lang="en-US"/>
           </a:p>
@@ -593,7 +593,7 @@
           <a:p>
             <a:fld id="{58B75DFA-885B-4A38-BC74-AE162579FFAE}" type="datetimeFigureOut">
               <a:rPr lang="en-US" smtClean="0"/>
-              <a:t>10/19/2026</a:t>
+              <a:t>10/23/2026</a:t>
             </a:fld>
             <a:endParaRPr lang="en-US"/>
           </a:p>
@@ -763,7 +763,7 @@
           <a:p>
             <a:fld id="{58B75DFA-885B-4A38-BC74-AE162579FFAE}" type="datetimeFigureOut">
               <a:rPr lang="en-US" smtClean="0"/>
-              <a:t>10/19/2026</a:t>
+              <a:t>10/23/2026</a:t>
             </a:fld>
             <a:endParaRPr lang="en-US"/>
           </a:p>
@@ -1009,7 +1009,7 @@
           <a:p>
             <a:fld id="{58B75DFA-885B-4A38-BC74-AE162579FFAE}" type="datetimeFigureOut">
               <a:rPr lang="en-US" smtClean="0"/>
-              <a:t>10/19/2026</a:t>
+              <a:t>10/23/2026</a:t>
             </a:fld>
             <a:endParaRPr lang="en-US"/>
           </a:p>
@@ -1241,7 +1241,7 @@
           <a:p>
             <a:fld id="{58B75DFA-885B-4A38-BC74-AE162579FFAE}" type="datetimeFigureOut">
               <a:rPr lang="en-US" smtClean="0"/>
-              <a:t>10/19/2026</a:t>
+              <a:t>10/23/2026</a:t>
             </a:fld>
             <a:endParaRPr lang="en-US"/>
           </a:p>
@@ -1608,7 +1608,7 @@
           <a:p>
             <a:fld id="{58B75DFA-885B-4A38-BC74-AE162579FFAE}" type="datetimeFigureOut">
               <a:rPr lang="en-US" smtClean="0"/>
-              <a:t>10/19/2026</a:t>
+              <a:t>10/23/2026</a:t>
             </a:fld>
             <a:endParaRPr lang="en-US"/>
           </a:p>
@@ -1726,7 +1726,7 @@
           <a:p>
             <a:fld id="{58B75DFA-885B-4A38-BC74-AE162579FFAE}" type="datetimeFigureOut">
               <a:rPr lang="en-US" smtClean="0"/>
-              <a:t>10/19/2026</a:t>
+              <a:t>10/23/2026</a:t>
             </a:fld>
             <a:endParaRPr lang="en-US"/>
           </a:p>
@@ -1821,7 +1821,7 @@
           <a:p>
             <a:fld id="{58B75DFA-885B-4A38-BC74-AE162579FFAE}" type="datetimeFigureOut">
               <a:rPr lang="en-US" smtClean="0"/>
-              <a:t>10/19/2026</a:t>
+              <a:t>10/23/2026</a:t>
             </a:fld>
             <a:endParaRPr lang="en-US"/>
           </a:p>
@@ -2098,7 +2098,7 @@
           <a:p>
             <a:fld id="{58B75DFA-885B-4A38-BC74-AE162579FFAE}" type="datetimeFigureOut">
               <a:rPr lang="en-US" smtClean="0"/>
-              <a:t>10/19/2026</a:t>
+              <a:t>10/23/2026</a:t>
             </a:fld>
             <a:endParaRPr lang="en-US"/>
           </a:p>
@@ -2355,7 +2355,7 @@
           <a:p>
             <a:fld id="{58B75DFA-885B-4A38-BC74-AE162579FFAE}" type="datetimeFigureOut">
               <a:rPr lang="en-US" smtClean="0"/>
-              <a:t>10/19/2026</a:t>
+              <a:t>10/23/2026</a:t>
             </a:fld>
             <a:endParaRPr lang="en-US"/>
           </a:p>
@@ -2568,7 +2568,7 @@
           <a:p>
             <a:fld id="{58B75DFA-885B-4A38-BC74-AE162579FFAE}" type="datetimeFigureOut">
               <a:rPr lang="en-US" smtClean="0"/>
-              <a:t>10/19/2026</a:t>
+              <a:t>10/23/2026</a:t>
             </a:fld>
             <a:endParaRPr lang="en-US"/>
           </a:p>
@@ -3035,8 +3035,8 @@
         </p:blipFill>
         <p:spPr>
           <a:xfrm>
-            <a:off x="2652434" y="1057263"/>
-            <a:ext cx="574513" cy="914398"/>
+            <a:off x="2653426" y="1057263"/>
+            <a:ext cx="572528" cy="914398"/>
           </a:xfrm>
           <a:prstGeom prst="rect">
             <a:avLst/>
@@ -3980,8 +3980,8 @@
         </p:blipFill>
         <p:spPr>
           <a:xfrm>
-            <a:off x="3227638" y="1057263"/>
-            <a:ext cx="574513" cy="914398"/>
+            <a:off x="3228630" y="1057263"/>
+            <a:ext cx="572528" cy="914398"/>
           </a:xfrm>
           <a:prstGeom prst="rect">
             <a:avLst/>
@@ -4050,8 +4050,8 @@
         </p:blipFill>
         <p:spPr>
           <a:xfrm>
-            <a:off x="2071645" y="1057263"/>
-            <a:ext cx="574515" cy="914400"/>
+            <a:off x="2072638" y="1057263"/>
+            <a:ext cx="572529" cy="914400"/>
           </a:xfrm>
           <a:prstGeom prst="rect">
             <a:avLst/>
@@ -5032,8 +5032,8 @@
         </p:blipFill>
         <p:spPr>
           <a:xfrm>
-            <a:off x="3798918" y="1058977"/>
-            <a:ext cx="575204" cy="914400"/>
+            <a:off x="3800255" y="1058977"/>
+            <a:ext cx="572529" cy="914400"/>
           </a:xfrm>
           <a:prstGeom prst="rect">
             <a:avLst/>
